--- a/Class_94_CUB_October_Template.pptx
+++ b/Class_94_CUB_October_Template.pptx
@@ -18,9 +18,12 @@
     <p:sldId id="266" r:id="rId12"/>
     <p:sldId id="267" r:id="rId13"/>
     <p:sldId id="268" r:id="rId14"/>
+    <p:sldId id="269" r:id="rId15"/>
+    <p:sldId id="270" r:id="rId16"/>
+    <p:sldId id="271" r:id="rId17"/>
   </p:sldIdLst>
   <p:notesMasterIdLst>
-    <p:notesMasterId r:id="rId15"/>
+    <p:notesMasterId r:id="rId18"/>
   </p:notesMasterIdLst>
   <p:sldSz cx="12192000" cy="6858000"/>
   <p:notesSz cx="6858000" cy="12192000"/>
@@ -866,7 +869,7 @@
           <a:p>
             <a:r>
               <a:rPr lang="en-US" dirty="0"/>
-              <a:t>4 bullets max per box, about 8 words each. Brief the so-what; don't read the slide. Decisions go on slide 12.</a:t>
+              <a:t>Hand the floor to the TAC cadre. Capture guidance on the Status Tracker.</a:t>
             </a:r>
             <a:endParaRPr lang="en-US" dirty="0"/>
           </a:p>
@@ -890,6 +893,270 @@
             <a:fld id="{F7021451-1387-4CA6-816F-3879F97B5CBC}" type="slidenum">
               <a:rPr lang="en-US"/>
               <a:t>13</a:t>
+            </a:fld>
+            <a:endParaRPr lang="en-US"/>
+          </a:p>
+        </p:txBody>
+      </p:sp>
+    </p:spTree>
+    <p:extLst>
+      <p:ext uri="{BB962C8B-B14F-4D97-AF65-F5344CB8AC3E}">
+        <p14:creationId xmlns:p14="http://schemas.microsoft.com/office/powerpoint/2010/main" val="1024086991"/>
+      </p:ext>
+    </p:extLst>
+  </p:cSld>
+  <p:clrMapOvr>
+    <a:masterClrMapping/>
+  </p:clrMapOvr>
+</p:notes>
+</file>
+
+<file path=ppt/notesSlides/notesSlide14.xml><?xml version="1.0" encoding="utf-8"?>
+<p:notes xmlns:a="http://schemas.openxmlformats.org/drawingml/2006/main" xmlns:r="http://schemas.openxmlformats.org/officeDocument/2006/relationships" xmlns:p="http://schemas.openxmlformats.org/presentationml/2006/main">
+  <p:cSld>
+    <p:spTree>
+      <p:nvGrpSpPr>
+        <p:cNvPr id="1" name=""/>
+        <p:cNvGrpSpPr/>
+        <p:nvPr/>
+      </p:nvGrpSpPr>
+      <p:grpSpPr>
+        <a:xfrm>
+          <a:off x="0" y="0"/>
+          <a:ext cx="0" cy="0"/>
+          <a:chOff x="0" y="0"/>
+          <a:chExt cx="0" cy="0"/>
+        </a:xfrm>
+      </p:grpSpPr>
+      <p:sp>
+        <p:nvSpPr>
+          <p:cNvPr id="2" name="Slide Image Placeholder 1"/>
+          <p:cNvSpPr>
+            <a:spLocks noGrp="1" noRot="1" noChangeAspect="1"/>
+          </p:cNvSpPr>
+          <p:nvPr>
+            <p:ph type="sldImg"/>
+          </p:nvPr>
+        </p:nvSpPr>
+        <p:spPr/>
+      </p:sp>
+      <p:sp>
+        <p:nvSpPr>
+          <p:cNvPr id="3" name="Notes Placeholder 2"/>
+          <p:cNvSpPr>
+            <a:spLocks noGrp="1"/>
+          </p:cNvSpPr>
+          <p:nvPr>
+            <p:ph type="body" idx="1"/>
+          </p:nvPr>
+        </p:nvSpPr>
+        <p:spPr/>
+        <p:txBody>
+          <a:bodyPr/>
+          <a:lstStyle/>
+          <a:p>
+            <a:r>
+              <a:rPr lang="en-US" dirty="0"/>
+              <a:t>Anything not briefed by a shop. One line each.</a:t>
+            </a:r>
+            <a:endParaRPr lang="en-US" dirty="0"/>
+          </a:p>
+        </p:txBody>
+      </p:sp>
+      <p:sp>
+        <p:nvSpPr>
+          <p:cNvPr id="4" name="Slide Number Placeholder 3"/>
+          <p:cNvSpPr>
+            <a:spLocks noGrp="1"/>
+          </p:cNvSpPr>
+          <p:nvPr>
+            <p:ph type="sldNum" sz="quarter" idx="10"/>
+          </p:nvPr>
+        </p:nvSpPr>
+        <p:spPr/>
+        <p:txBody>
+          <a:bodyPr/>
+          <a:lstStyle/>
+          <a:p>
+            <a:fld id="{F7021451-1387-4CA6-816F-3879F97B5CBC}" type="slidenum">
+              <a:rPr lang="en-US"/>
+              <a:t>14</a:t>
+            </a:fld>
+            <a:endParaRPr lang="en-US"/>
+          </a:p>
+        </p:txBody>
+      </p:sp>
+    </p:spTree>
+    <p:extLst>
+      <p:ext uri="{BB962C8B-B14F-4D97-AF65-F5344CB8AC3E}">
+        <p14:creationId xmlns:p14="http://schemas.microsoft.com/office/powerpoint/2010/main" val="1024086991"/>
+      </p:ext>
+    </p:extLst>
+  </p:cSld>
+  <p:clrMapOvr>
+    <a:masterClrMapping/>
+  </p:clrMapOvr>
+</p:notes>
+</file>
+
+<file path=ppt/notesSlides/notesSlide15.xml><?xml version="1.0" encoding="utf-8"?>
+<p:notes xmlns:a="http://schemas.openxmlformats.org/drawingml/2006/main" xmlns:r="http://schemas.openxmlformats.org/officeDocument/2006/relationships" xmlns:p="http://schemas.openxmlformats.org/presentationml/2006/main">
+  <p:cSld>
+    <p:spTree>
+      <p:nvGrpSpPr>
+        <p:cNvPr id="1" name=""/>
+        <p:cNvGrpSpPr/>
+        <p:nvPr/>
+      </p:nvGrpSpPr>
+      <p:grpSpPr>
+        <a:xfrm>
+          <a:off x="0" y="0"/>
+          <a:ext cx="0" cy="0"/>
+          <a:chOff x="0" y="0"/>
+          <a:chExt cx="0" cy="0"/>
+        </a:xfrm>
+      </p:grpSpPr>
+      <p:sp>
+        <p:nvSpPr>
+          <p:cNvPr id="2" name="Slide Image Placeholder 1"/>
+          <p:cNvSpPr>
+            <a:spLocks noGrp="1" noRot="1" noChangeAspect="1"/>
+          </p:cNvSpPr>
+          <p:nvPr>
+            <p:ph type="sldImg"/>
+          </p:nvPr>
+        </p:nvSpPr>
+        <p:spPr/>
+      </p:sp>
+      <p:sp>
+        <p:nvSpPr>
+          <p:cNvPr id="3" name="Notes Placeholder 2"/>
+          <p:cNvSpPr>
+            <a:spLocks noGrp="1"/>
+          </p:cNvSpPr>
+          <p:nvPr>
+            <p:ph type="body" idx="1"/>
+          </p:nvPr>
+        </p:nvSpPr>
+        <p:spPr/>
+        <p:txBody>
+          <a:bodyPr/>
+          <a:lstStyle/>
+          <a:p>
+            <a:r>
+              <a:rPr lang="en-US" dirty="0"/>
+              <a:t>Hand the floor to the Company Commander. Capture guidance on the Status Tracker.</a:t>
+            </a:r>
+            <a:endParaRPr lang="en-US" dirty="0"/>
+          </a:p>
+        </p:txBody>
+      </p:sp>
+      <p:sp>
+        <p:nvSpPr>
+          <p:cNvPr id="4" name="Slide Number Placeholder 3"/>
+          <p:cNvSpPr>
+            <a:spLocks noGrp="1"/>
+          </p:cNvSpPr>
+          <p:nvPr>
+            <p:ph type="sldNum" sz="quarter" idx="10"/>
+          </p:nvPr>
+        </p:nvSpPr>
+        <p:spPr/>
+        <p:txBody>
+          <a:bodyPr/>
+          <a:lstStyle/>
+          <a:p>
+            <a:fld id="{F7021451-1387-4CA6-816F-3879F97B5CBC}" type="slidenum">
+              <a:rPr lang="en-US"/>
+              <a:t>15</a:t>
+            </a:fld>
+            <a:endParaRPr lang="en-US"/>
+          </a:p>
+        </p:txBody>
+      </p:sp>
+    </p:spTree>
+    <p:extLst>
+      <p:ext uri="{BB962C8B-B14F-4D97-AF65-F5344CB8AC3E}">
+        <p14:creationId xmlns:p14="http://schemas.microsoft.com/office/powerpoint/2010/main" val="1024086991"/>
+      </p:ext>
+    </p:extLst>
+  </p:cSld>
+  <p:clrMapOvr>
+    <a:masterClrMapping/>
+  </p:clrMapOvr>
+</p:notes>
+</file>
+
+<file path=ppt/notesSlides/notesSlide16.xml><?xml version="1.0" encoding="utf-8"?>
+<p:notes xmlns:a="http://schemas.openxmlformats.org/drawingml/2006/main" xmlns:r="http://schemas.openxmlformats.org/officeDocument/2006/relationships" xmlns:p="http://schemas.openxmlformats.org/presentationml/2006/main">
+  <p:cSld>
+    <p:spTree>
+      <p:nvGrpSpPr>
+        <p:cNvPr id="1" name=""/>
+        <p:cNvGrpSpPr/>
+        <p:nvPr/>
+      </p:nvGrpSpPr>
+      <p:grpSpPr>
+        <a:xfrm>
+          <a:off x="0" y="0"/>
+          <a:ext cx="0" cy="0"/>
+          <a:chOff x="0" y="0"/>
+          <a:chExt cx="0" cy="0"/>
+        </a:xfrm>
+      </p:grpSpPr>
+      <p:sp>
+        <p:nvSpPr>
+          <p:cNvPr id="2" name="Slide Image Placeholder 1"/>
+          <p:cNvSpPr>
+            <a:spLocks noGrp="1" noRot="1" noChangeAspect="1"/>
+          </p:cNvSpPr>
+          <p:nvPr>
+            <p:ph type="sldImg"/>
+          </p:nvPr>
+        </p:nvSpPr>
+        <p:spPr/>
+      </p:sp>
+      <p:sp>
+        <p:nvSpPr>
+          <p:cNvPr id="3" name="Notes Placeholder 2"/>
+          <p:cNvSpPr>
+            <a:spLocks noGrp="1"/>
+          </p:cNvSpPr>
+          <p:nvPr>
+            <p:ph type="body" idx="1"/>
+          </p:nvPr>
+        </p:nvSpPr>
+        <p:spPr/>
+        <p:txBody>
+          <a:bodyPr/>
+          <a:lstStyle/>
+          <a:p>
+            <a:r>
+              <a:rPr lang="en-US" dirty="0"/>
+              <a:t>Open floor. Record any new taskings on the Status Tracker.</a:t>
+            </a:r>
+            <a:endParaRPr lang="en-US" dirty="0"/>
+          </a:p>
+        </p:txBody>
+      </p:sp>
+      <p:sp>
+        <p:nvSpPr>
+          <p:cNvPr id="4" name="Slide Number Placeholder 3"/>
+          <p:cNvSpPr>
+            <a:spLocks noGrp="1"/>
+          </p:cNvSpPr>
+          <p:nvPr>
+            <p:ph type="sldNum" sz="quarter" idx="10"/>
+          </p:nvPr>
+        </p:nvSpPr>
+        <p:spPr/>
+        <p:txBody>
+          <a:bodyPr/>
+          <a:lstStyle/>
+          <a:p>
+            <a:fld id="{F7021451-1387-4CA6-816F-3879F97B5CBC}" type="slidenum">
+              <a:rPr lang="en-US"/>
+              <a:t>16</a:t>
             </a:fld>
             <a:endParaRPr lang="en-US"/>
           </a:p>
@@ -6703,8 +6970,8 @@
         </p:nvSpPr>
         <p:spPr>
           <a:xfrm>
-            <a:off x="502920" y="1280160"/>
-            <a:ext cx="5510632" cy="2043684"/>
+            <a:off x="502920" y="2423160"/>
+            <a:ext cx="11185855" cy="1737360"/>
           </a:xfrm>
           <a:prstGeom prst="rect">
             <a:avLst/>
@@ -6728,8 +6995,8 @@
         </p:nvSpPr>
         <p:spPr>
           <a:xfrm>
-            <a:off x="777240" y="1554480"/>
-            <a:ext cx="640080" cy="640080"/>
+            <a:off x="960120" y="2880360"/>
+            <a:ext cx="822960" cy="822960"/>
           </a:xfrm>
           <a:prstGeom prst="rect">
             <a:avLst/>
@@ -6747,7 +7014,7 @@
               <a:buNone/>
             </a:pPr>
             <a:r>
-              <a:rPr lang="en-US" sz="2800" b="1" dirty="0">
+              <a:rPr lang="en-US" sz="3400" b="1" dirty="0">
                 <a:solidFill>
                   <a:srgbClr val="FFFFFF"/>
                 </a:solidFill>
@@ -6757,7 +7024,7 @@
               </a:rPr>
               <a:t>1</a:t>
             </a:r>
-            <a:endParaRPr lang="en-US" sz="2800" dirty="0"/>
+            <a:endParaRPr lang="en-US" sz="3400" dirty="0"/>
           </a:p>
         </p:txBody>
       </p:sp>
@@ -6769,8 +7036,8 @@
         </p:nvSpPr>
         <p:spPr>
           <a:xfrm>
-            <a:off x="1600200" y="1508760"/>
-            <a:ext cx="4230472" cy="731520"/>
+            <a:off x="2148840" y="2788920"/>
+            <a:ext cx="9174175" cy="685800"/>
           </a:xfrm>
           <a:prstGeom prst="rect">
             <a:avLst/>
@@ -6786,7 +7053,7 @@
               <a:buNone/>
             </a:pPr>
             <a:r>
-              <a:rPr lang="en-US" sz="2800" b="1" dirty="0">
+              <a:rPr lang="en-US" sz="4000" b="1" dirty="0">
                 <a:solidFill>
                   <a:srgbClr val="000000"/>
                 </a:solidFill>
@@ -6796,7 +7063,7 @@
               </a:rPr>
               <a:t>TAC Cadre</a:t>
             </a:r>
-            <a:endParaRPr lang="en-US" sz="2800" dirty="0"/>
+            <a:endParaRPr lang="en-US" sz="4000" dirty="0"/>
           </a:p>
         </p:txBody>
       </p:sp>
@@ -6808,8 +7075,8 @@
         </p:nvSpPr>
         <p:spPr>
           <a:xfrm>
-            <a:off x="1600200" y="2240280"/>
-            <a:ext cx="4230472" cy="457200"/>
+            <a:off x="2148840" y="3474720"/>
+            <a:ext cx="9174175" cy="411480"/>
           </a:xfrm>
           <a:prstGeom prst="rect">
             <a:avLst/>
@@ -6825,7 +7092,7 @@
               <a:buNone/>
             </a:pPr>
             <a:r>
-              <a:rPr lang="en-US" sz="1400" dirty="0">
+              <a:rPr lang="en-US" sz="1600" dirty="0">
                 <a:solidFill>
                   <a:srgbClr val="1F4E2C"/>
                 </a:solidFill>
@@ -6835,20 +7102,86 @@
               </a:rPr>
               <a:t>Cadre remarks and guidance</a:t>
             </a:r>
-            <a:endParaRPr lang="en-US" sz="1400" dirty="0"/>
+            <a:endParaRPr lang="en-US" sz="1600" dirty="0"/>
           </a:p>
         </p:txBody>
       </p:sp>
-      <p:sp>
-        <p:nvSpPr>
-          <p:cNvPr id="8" name="Shape 5"/>
+    </p:spTree>
+  </p:cSld>
+  <p:clrMapOvr>
+    <a:masterClrMapping/>
+  </p:clrMapOvr>
+</p:sld>
+</file>
+
+<file path=ppt/slides/slide14.xml><?xml version="1.0" encoding="utf-8"?>
+<p:sld xmlns:a="http://schemas.openxmlformats.org/drawingml/2006/main" xmlns:r="http://schemas.openxmlformats.org/officeDocument/2006/relationships" xmlns:p="http://schemas.openxmlformats.org/presentationml/2006/main">
+  <p:cSld name="Slide 14">
+    <p:spTree>
+      <p:nvGrpSpPr>
+        <p:cNvPr id="1" name=""/>
+        <p:cNvGrpSpPr/>
+        <p:nvPr/>
+      </p:nvGrpSpPr>
+      <p:grpSpPr>
+        <a:xfrm>
+          <a:off x="0" y="0"/>
+          <a:ext cx="0" cy="0"/>
+          <a:chOff x="0" y="0"/>
+          <a:chExt cx="0" cy="0"/>
+        </a:xfrm>
+      </p:grpSpPr>
+      <p:sp>
+        <p:nvSpPr>
+          <p:cNvPr id="2" name="Text 6"/>
           <p:cNvSpPr/>
-          <p:nvPr/>
-        </p:nvSpPr>
-        <p:spPr>
-          <a:xfrm>
-            <a:off x="6178144" y="1280160"/>
-            <a:ext cx="5510632" cy="2043684"/>
+          <p:nvPr>
+            <p:ph idx="108" type="title" hasCustomPrompt="1"/>
+          </p:nvPr>
+        </p:nvSpPr>
+        <p:spPr>
+          <a:xfrm>
+            <a:off x="1188720" y="201168"/>
+            <a:ext cx="9814255" cy="713232"/>
+          </a:xfrm>
+          <a:prstGeom prst="rect">
+            <a:avLst/>
+          </a:prstGeom>
+          <a:noFill/>
+          <a:ln/>
+        </p:spPr>
+        <p:txBody>
+          <a:bodyPr wrap="square" lIns="0" tIns="0" rIns="0" bIns="0" rtlCol="0" anchor="ctr"/>
+          <a:lstStyle/>
+          <a:p>
+            <a:pPr algn="ctr" indent="0" marL="0">
+              <a:buNone/>
+            </a:pPr>
+            <a:r>
+              <a:rPr lang="en-US" sz="3600" b="1" dirty="0">
+                <a:solidFill>
+                  <a:srgbClr val="000000"/>
+                </a:solidFill>
+                <a:latin typeface="Arial" pitchFamily="34" charset="0"/>
+                <a:ea typeface="Arial" pitchFamily="34" charset="-122"/>
+                <a:cs typeface="Arial" pitchFamily="34" charset="-120"/>
+              </a:rPr>
+              <a:t>Closing</a:t>
+            </a:r>
+            <a:endParaRPr lang="en-US" sz="3600" dirty="0"/>
+          </a:p>
+        </p:txBody>
+      </p:sp>
+      <p:sp>
+        <p:nvSpPr>
+          <p:cNvPr id="4" name="Shape 1"/>
+          <p:cNvSpPr/>
+          <p:nvPr/>
+        </p:nvSpPr>
+        <p:spPr>
+          <a:xfrm>
+            <a:off x="502920" y="2423160"/>
+            <a:ext cx="11185855" cy="1737360"/>
           </a:xfrm>
           <a:prstGeom prst="rect">
             <a:avLst/>
@@ -6866,14 +7199,14 @@
       </p:sp>
       <p:sp>
         <p:nvSpPr>
-          <p:cNvPr id="9" name="Text 6"/>
+          <p:cNvPr id="5" name="Text 2"/>
           <p:cNvSpPr txBox="1"/>
           <p:nvPr/>
         </p:nvSpPr>
         <p:spPr>
           <a:xfrm>
-            <a:off x="6452464" y="1554480"/>
-            <a:ext cx="640080" cy="640080"/>
+            <a:off x="960120" y="2880360"/>
+            <a:ext cx="822960" cy="822960"/>
           </a:xfrm>
           <a:prstGeom prst="rect">
             <a:avLst/>
@@ -6891,7 +7224,7 @@
               <a:buNone/>
             </a:pPr>
             <a:r>
-              <a:rPr lang="en-US" sz="2800" b="1" dirty="0">
+              <a:rPr lang="en-US" sz="3400" b="1" dirty="0">
                 <a:solidFill>
                   <a:srgbClr val="FFFFFF"/>
                 </a:solidFill>
@@ -6901,20 +7234,20 @@
               </a:rPr>
               <a:t>2</a:t>
             </a:r>
-            <a:endParaRPr lang="en-US" sz="2800" dirty="0"/>
+            <a:endParaRPr lang="en-US" sz="3400" dirty="0"/>
           </a:p>
         </p:txBody>
       </p:sp>
       <p:sp>
         <p:nvSpPr>
-          <p:cNvPr id="10" name="Text 7"/>
+          <p:cNvPr id="6" name="Text 3"/>
           <p:cNvSpPr txBox="1"/>
           <p:nvPr/>
         </p:nvSpPr>
         <p:spPr>
           <a:xfrm>
-            <a:off x="7275424" y="1508760"/>
-            <a:ext cx="4230472" cy="731520"/>
+            <a:off x="2148840" y="2788920"/>
+            <a:ext cx="9174175" cy="685800"/>
           </a:xfrm>
           <a:prstGeom prst="rect">
             <a:avLst/>
@@ -6930,7 +7263,7 @@
               <a:buNone/>
             </a:pPr>
             <a:r>
-              <a:rPr lang="en-US" sz="2800" b="1" dirty="0">
+              <a:rPr lang="en-US" sz="4000" b="1" dirty="0">
                 <a:solidFill>
                   <a:srgbClr val="000000"/>
                 </a:solidFill>
@@ -6940,20 +7273,20 @@
               </a:rPr>
               <a:t>Alibis</a:t>
             </a:r>
-            <a:endParaRPr lang="en-US" sz="2800" dirty="0"/>
+            <a:endParaRPr lang="en-US" sz="4000" dirty="0"/>
           </a:p>
         </p:txBody>
       </p:sp>
       <p:sp>
         <p:nvSpPr>
-          <p:cNvPr id="11" name="Text 8"/>
+          <p:cNvPr id="7" name="Text 4"/>
           <p:cNvSpPr txBox="1"/>
           <p:nvPr/>
         </p:nvSpPr>
         <p:spPr>
           <a:xfrm>
-            <a:off x="7275424" y="2240280"/>
-            <a:ext cx="4230472" cy="457200"/>
+            <a:off x="2148840" y="3474720"/>
+            <a:ext cx="9174175" cy="411480"/>
           </a:xfrm>
           <a:prstGeom prst="rect">
             <a:avLst/>
@@ -6969,7 +7302,7 @@
               <a:buNone/>
             </a:pPr>
             <a:r>
-              <a:rPr lang="en-US" sz="1400" dirty="0">
+              <a:rPr lang="en-US" sz="1600" dirty="0">
                 <a:solidFill>
                   <a:srgbClr val="1F4E2C"/>
                 </a:solidFill>
@@ -6979,20 +7312,86 @@
               </a:rPr>
               <a:t>Outstanding items from the platoon</a:t>
             </a:r>
-            <a:endParaRPr lang="en-US" sz="1400" dirty="0"/>
+            <a:endParaRPr lang="en-US" sz="1600" dirty="0"/>
           </a:p>
         </p:txBody>
       </p:sp>
-      <p:sp>
-        <p:nvSpPr>
-          <p:cNvPr id="12" name="Shape 9"/>
+    </p:spTree>
+  </p:cSld>
+  <p:clrMapOvr>
+    <a:masterClrMapping/>
+  </p:clrMapOvr>
+</p:sld>
+</file>
+
+<file path=ppt/slides/slide15.xml><?xml version="1.0" encoding="utf-8"?>
+<p:sld xmlns:a="http://schemas.openxmlformats.org/drawingml/2006/main" xmlns:r="http://schemas.openxmlformats.org/officeDocument/2006/relationships" xmlns:p="http://schemas.openxmlformats.org/presentationml/2006/main">
+  <p:cSld name="Slide 15">
+    <p:spTree>
+      <p:nvGrpSpPr>
+        <p:cNvPr id="1" name=""/>
+        <p:cNvGrpSpPr/>
+        <p:nvPr/>
+      </p:nvGrpSpPr>
+      <p:grpSpPr>
+        <a:xfrm>
+          <a:off x="0" y="0"/>
+          <a:ext cx="0" cy="0"/>
+          <a:chOff x="0" y="0"/>
+          <a:chExt cx="0" cy="0"/>
+        </a:xfrm>
+      </p:grpSpPr>
+      <p:sp>
+        <p:nvSpPr>
+          <p:cNvPr id="2" name="Text 6"/>
           <p:cNvSpPr/>
-          <p:nvPr/>
-        </p:nvSpPr>
-        <p:spPr>
-          <a:xfrm>
-            <a:off x="502920" y="3488436"/>
-            <a:ext cx="5510632" cy="2043684"/>
+          <p:nvPr>
+            <p:ph idx="108" type="title" hasCustomPrompt="1"/>
+          </p:nvPr>
+        </p:nvSpPr>
+        <p:spPr>
+          <a:xfrm>
+            <a:off x="1188720" y="201168"/>
+            <a:ext cx="9814255" cy="713232"/>
+          </a:xfrm>
+          <a:prstGeom prst="rect">
+            <a:avLst/>
+          </a:prstGeom>
+          <a:noFill/>
+          <a:ln/>
+        </p:spPr>
+        <p:txBody>
+          <a:bodyPr wrap="square" lIns="0" tIns="0" rIns="0" bIns="0" rtlCol="0" anchor="ctr"/>
+          <a:lstStyle/>
+          <a:p>
+            <a:pPr algn="ctr" indent="0" marL="0">
+              <a:buNone/>
+            </a:pPr>
+            <a:r>
+              <a:rPr lang="en-US" sz="3600" b="1" dirty="0">
+                <a:solidFill>
+                  <a:srgbClr val="000000"/>
+                </a:solidFill>
+                <a:latin typeface="Arial" pitchFamily="34" charset="0"/>
+                <a:ea typeface="Arial" pitchFamily="34" charset="-122"/>
+                <a:cs typeface="Arial" pitchFamily="34" charset="-120"/>
+              </a:rPr>
+              <a:t>Closing</a:t>
+            </a:r>
+            <a:endParaRPr lang="en-US" sz="3600" dirty="0"/>
+          </a:p>
+        </p:txBody>
+      </p:sp>
+      <p:sp>
+        <p:nvSpPr>
+          <p:cNvPr id="4" name="Shape 1"/>
+          <p:cNvSpPr/>
+          <p:nvPr/>
+        </p:nvSpPr>
+        <p:spPr>
+          <a:xfrm>
+            <a:off x="502920" y="2423160"/>
+            <a:ext cx="11185855" cy="1737360"/>
           </a:xfrm>
           <a:prstGeom prst="rect">
             <a:avLst/>
@@ -7010,14 +7409,14 @@
       </p:sp>
       <p:sp>
         <p:nvSpPr>
-          <p:cNvPr id="13" name="Text 10"/>
+          <p:cNvPr id="5" name="Text 2"/>
           <p:cNvSpPr txBox="1"/>
           <p:nvPr/>
         </p:nvSpPr>
         <p:spPr>
           <a:xfrm>
-            <a:off x="777240" y="3762756"/>
-            <a:ext cx="640080" cy="640080"/>
+            <a:off x="960120" y="2880360"/>
+            <a:ext cx="822960" cy="822960"/>
           </a:xfrm>
           <a:prstGeom prst="rect">
             <a:avLst/>
@@ -7035,7 +7434,7 @@
               <a:buNone/>
             </a:pPr>
             <a:r>
-              <a:rPr lang="en-US" sz="2800" b="1" dirty="0">
+              <a:rPr lang="en-US" sz="3400" b="1" dirty="0">
                 <a:solidFill>
                   <a:srgbClr val="FFFFFF"/>
                 </a:solidFill>
@@ -7045,20 +7444,20 @@
               </a:rPr>
               <a:t>3</a:t>
             </a:r>
-            <a:endParaRPr lang="en-US" sz="2800" dirty="0"/>
+            <a:endParaRPr lang="en-US" sz="3400" dirty="0"/>
           </a:p>
         </p:txBody>
       </p:sp>
       <p:sp>
         <p:nvSpPr>
-          <p:cNvPr id="14" name="Text 11"/>
+          <p:cNvPr id="6" name="Text 3"/>
           <p:cNvSpPr txBox="1"/>
           <p:nvPr/>
         </p:nvSpPr>
         <p:spPr>
           <a:xfrm>
-            <a:off x="1600200" y="3717036"/>
-            <a:ext cx="4230472" cy="731520"/>
+            <a:off x="2148840" y="2788920"/>
+            <a:ext cx="9174175" cy="685800"/>
           </a:xfrm>
           <a:prstGeom prst="rect">
             <a:avLst/>
@@ -7074,7 +7473,7 @@
               <a:buNone/>
             </a:pPr>
             <a:r>
-              <a:rPr lang="en-US" sz="2800" b="1" dirty="0">
+              <a:rPr lang="en-US" sz="4000" b="1" dirty="0">
                 <a:solidFill>
                   <a:srgbClr val="000000"/>
                 </a:solidFill>
@@ -7084,20 +7483,20 @@
               </a:rPr>
               <a:t>Company Commander</a:t>
             </a:r>
-            <a:endParaRPr lang="en-US" sz="2800" dirty="0"/>
+            <a:endParaRPr lang="en-US" sz="4000" dirty="0"/>
           </a:p>
         </p:txBody>
       </p:sp>
       <p:sp>
         <p:nvSpPr>
-          <p:cNvPr id="15" name="Text 12"/>
+          <p:cNvPr id="7" name="Text 4"/>
           <p:cNvSpPr txBox="1"/>
           <p:nvPr/>
         </p:nvSpPr>
         <p:spPr>
           <a:xfrm>
-            <a:off x="1600200" y="4448556"/>
-            <a:ext cx="4230472" cy="457200"/>
+            <a:off x="2148840" y="3474720"/>
+            <a:ext cx="9174175" cy="411480"/>
           </a:xfrm>
           <a:prstGeom prst="rect">
             <a:avLst/>
@@ -7113,7 +7512,7 @@
               <a:buNone/>
             </a:pPr>
             <a:r>
-              <a:rPr lang="en-US" sz="1400" dirty="0">
+              <a:rPr lang="en-US" sz="1600" dirty="0">
                 <a:solidFill>
                   <a:srgbClr val="1F4E2C"/>
                 </a:solidFill>
@@ -7123,20 +7522,86 @@
               </a:rPr>
               <a:t>Commander's remarks and guidance</a:t>
             </a:r>
-            <a:endParaRPr lang="en-US" sz="1400" dirty="0"/>
+            <a:endParaRPr lang="en-US" sz="1600" dirty="0"/>
           </a:p>
         </p:txBody>
       </p:sp>
-      <p:sp>
-        <p:nvSpPr>
-          <p:cNvPr id="16" name="Shape 13"/>
+    </p:spTree>
+  </p:cSld>
+  <p:clrMapOvr>
+    <a:masterClrMapping/>
+  </p:clrMapOvr>
+</p:sld>
+</file>
+
+<file path=ppt/slides/slide16.xml><?xml version="1.0" encoding="utf-8"?>
+<p:sld xmlns:a="http://schemas.openxmlformats.org/drawingml/2006/main" xmlns:r="http://schemas.openxmlformats.org/officeDocument/2006/relationships" xmlns:p="http://schemas.openxmlformats.org/presentationml/2006/main">
+  <p:cSld name="Slide 16">
+    <p:spTree>
+      <p:nvGrpSpPr>
+        <p:cNvPr id="1" name=""/>
+        <p:cNvGrpSpPr/>
+        <p:nvPr/>
+      </p:nvGrpSpPr>
+      <p:grpSpPr>
+        <a:xfrm>
+          <a:off x="0" y="0"/>
+          <a:ext cx="0" cy="0"/>
+          <a:chOff x="0" y="0"/>
+          <a:chExt cx="0" cy="0"/>
+        </a:xfrm>
+      </p:grpSpPr>
+      <p:sp>
+        <p:nvSpPr>
+          <p:cNvPr id="2" name="Text 6"/>
           <p:cNvSpPr/>
-          <p:nvPr/>
-        </p:nvSpPr>
-        <p:spPr>
-          <a:xfrm>
-            <a:off x="6178144" y="3488436"/>
-            <a:ext cx="5510632" cy="2043684"/>
+          <p:nvPr>
+            <p:ph idx="108" type="title" hasCustomPrompt="1"/>
+          </p:nvPr>
+        </p:nvSpPr>
+        <p:spPr>
+          <a:xfrm>
+            <a:off x="1188720" y="201168"/>
+            <a:ext cx="9814255" cy="713232"/>
+          </a:xfrm>
+          <a:prstGeom prst="rect">
+            <a:avLst/>
+          </a:prstGeom>
+          <a:noFill/>
+          <a:ln/>
+        </p:spPr>
+        <p:txBody>
+          <a:bodyPr wrap="square" lIns="0" tIns="0" rIns="0" bIns="0" rtlCol="0" anchor="ctr"/>
+          <a:lstStyle/>
+          <a:p>
+            <a:pPr algn="ctr" indent="0" marL="0">
+              <a:buNone/>
+            </a:pPr>
+            <a:r>
+              <a:rPr lang="en-US" sz="3600" b="1" dirty="0">
+                <a:solidFill>
+                  <a:srgbClr val="000000"/>
+                </a:solidFill>
+                <a:latin typeface="Arial" pitchFamily="34" charset="0"/>
+                <a:ea typeface="Arial" pitchFamily="34" charset="-122"/>
+                <a:cs typeface="Arial" pitchFamily="34" charset="-120"/>
+              </a:rPr>
+              <a:t>Closing</a:t>
+            </a:r>
+            <a:endParaRPr lang="en-US" sz="3600" dirty="0"/>
+          </a:p>
+        </p:txBody>
+      </p:sp>
+      <p:sp>
+        <p:nvSpPr>
+          <p:cNvPr id="4" name="Shape 1"/>
+          <p:cNvSpPr/>
+          <p:nvPr/>
+        </p:nvSpPr>
+        <p:spPr>
+          <a:xfrm>
+            <a:off x="502920" y="2423160"/>
+            <a:ext cx="11185855" cy="1737360"/>
           </a:xfrm>
           <a:prstGeom prst="rect">
             <a:avLst/>
@@ -7154,14 +7619,14 @@
       </p:sp>
       <p:sp>
         <p:nvSpPr>
-          <p:cNvPr id="17" name="Text 14"/>
+          <p:cNvPr id="5" name="Text 2"/>
           <p:cNvSpPr txBox="1"/>
           <p:nvPr/>
         </p:nvSpPr>
         <p:spPr>
           <a:xfrm>
-            <a:off x="6452464" y="3762756"/>
-            <a:ext cx="640080" cy="640080"/>
+            <a:off x="960120" y="2880360"/>
+            <a:ext cx="822960" cy="822960"/>
           </a:xfrm>
           <a:prstGeom prst="rect">
             <a:avLst/>
@@ -7179,7 +7644,7 @@
               <a:buNone/>
             </a:pPr>
             <a:r>
-              <a:rPr lang="en-US" sz="2800" b="1" dirty="0">
+              <a:rPr lang="en-US" sz="3400" b="1" dirty="0">
                 <a:solidFill>
                   <a:srgbClr val="FFFFFF"/>
                 </a:solidFill>
@@ -7189,20 +7654,20 @@
               </a:rPr>
               <a:t>4</a:t>
             </a:r>
-            <a:endParaRPr lang="en-US" sz="2800" dirty="0"/>
+            <a:endParaRPr lang="en-US" sz="3400" dirty="0"/>
           </a:p>
         </p:txBody>
       </p:sp>
       <p:sp>
         <p:nvSpPr>
-          <p:cNvPr id="18" name="Text 15"/>
+          <p:cNvPr id="6" name="Text 3"/>
           <p:cNvSpPr txBox="1"/>
           <p:nvPr/>
         </p:nvSpPr>
         <p:spPr>
           <a:xfrm>
-            <a:off x="7275424" y="3717036"/>
-            <a:ext cx="4230472" cy="731520"/>
+            <a:off x="2148840" y="2788920"/>
+            <a:ext cx="9174175" cy="685800"/>
           </a:xfrm>
           <a:prstGeom prst="rect">
             <a:avLst/>
@@ -7218,7 +7683,7 @@
               <a:buNone/>
             </a:pPr>
             <a:r>
-              <a:rPr lang="en-US" sz="2800" b="1" dirty="0">
+              <a:rPr lang="en-US" sz="4000" b="1" dirty="0">
                 <a:solidFill>
                   <a:srgbClr val="000000"/>
                 </a:solidFill>
@@ -7228,7 +7693,46 @@
               </a:rPr>
               <a:t>Questions</a:t>
             </a:r>
-            <a:endParaRPr lang="en-US" sz="2800" dirty="0"/>
+            <a:endParaRPr lang="en-US" sz="4000" dirty="0"/>
+          </a:p>
+        </p:txBody>
+      </p:sp>
+      <p:sp>
+        <p:nvSpPr>
+          <p:cNvPr id="7" name="Text 4"/>
+          <p:cNvSpPr txBox="1"/>
+          <p:nvPr/>
+        </p:nvSpPr>
+        <p:spPr>
+          <a:xfrm>
+            <a:off x="2148840" y="3474720"/>
+            <a:ext cx="9174175" cy="411480"/>
+          </a:xfrm>
+          <a:prstGeom prst="rect">
+            <a:avLst/>
+          </a:prstGeom>
+          <a:noFill/>
+          <a:ln/>
+        </p:spPr>
+        <p:txBody>
+          <a:bodyPr wrap="square" lIns="0" tIns="0" rIns="0" bIns="0" rtlCol="0" anchor="t"/>
+          <a:lstStyle/>
+          <a:p>
+            <a:pPr indent="0" marL="0">
+              <a:buNone/>
+            </a:pPr>
+            <a:r>
+              <a:rPr lang="en-US" sz="1600" dirty="0">
+                <a:solidFill>
+                  <a:srgbClr val="1F4E2C"/>
+                </a:solidFill>
+                <a:latin typeface="Arial" pitchFamily="34" charset="0"/>
+                <a:ea typeface="Arial" pitchFamily="34" charset="-122"/>
+                <a:cs typeface="Arial" pitchFamily="34" charset="-120"/>
+              </a:rPr>
+              <a:t>Open floor</a:t>
+            </a:r>
+            <a:endParaRPr lang="en-US" sz="1600" dirty="0"/>
           </a:p>
         </p:txBody>
       </p:sp>
@@ -7545,7 +8049,7 @@
                 <a:ea typeface="Arial" pitchFamily="34" charset="-122"/>
                 <a:cs typeface="Arial" pitchFamily="34" charset="-120"/>
               </a:rPr>
-              <a:t>Closing: TAC Cadre | Alibis | Company Commander | Questions</a:t>
+              <a:t>TAC Cadre  |  Alibis  |  Company Commander  |  Questions</a:t>
             </a:r>
             <a:endParaRPr lang="en-US" sz="2000" dirty="0"/>
           </a:p>
